--- a/LGA_롯데신사업_발표.pptx
+++ b/LGA_롯데신사업_발표.pptx
@@ -1958,7 +1958,8 @@
           <a:p>
             <a:r>
               <a:rPr lang="en-US" dirty="0"/>
-              <a:t>일곱 번째, 핵심 활동. 세 가지로 나뉩니다. 생산은 시스템이 합니다. 영상을 클라우드로 올리지 않고 카메라 단에서 숫자로 바꾸고, 리포트의 90%는 자동 생성됩니다. 문제해결은 사람이 합니다. 이게 상품의 본체입니다 - 인사이트 분석, 처방, 그리고 POS 검증. 플랫폼은 시간이 합니다. 벤치마크 DB는 쌓일수록 강해집니다. 그리고 운영 원칙 하나. 저희는 사람을 추적하지 않습니다. 영상은 카메라 안에서 익명 숫자로 바뀌고, 개인 연결은 고객이 앱에서 동의한 경우에만, 그 사이는 세그먼트 집계 단위로만 연결합니다. 이건 규제 대응이 아니라 핵심가치 존중을 설계에 넣은 것입니다. 법적으로 안전하고, 무엇보다 고객 신뢰를 잃지 않는 구조입니다. (45초)</a:t>
+              <a:t>일곱 번째, 핵심 활동. 세 가지로 나뉩니다. 생산은 시스템이 합니다. 영상을 클라우드로 올리지 않고 카메라 단에서 숫자로 바꾸고, 리포트의 90%는 자동 생성됩니다. 문제해결은 사람이 합니다. 이게 상품의 본체입니다 - 인사이트 분석, 처방, 그리고 POS 검증. 플랫폼은 시간이 합니다. 벤치마크 DB는 쌓일수록 강해집니다. 그리고 운영 원칙 하나. 저희는 사람을 추적하지 않습니다. 영상은 카메라 안에서 익명 숫자로 바뀌고, 개인 연결은 고객이 앱에서 동의한 경우에만, 그 사이는 세그먼트 집계 단위로만 연결합니다. 이건 규제 대응이 아니라 핵심가치 존중을 설계에 넣은 것입니다.
+두 층의 커버리지가 다르다는 점을 봐주십시오. 1층은 비회원을 포함한 방문자 100%입니다. 얼굴 특징값을 저장하지 않고 연령대와 성별 속성값만 뽑기 때문에 익명이고, 그래서 전수로 쓸 수 있습니다. 2층은 동의한 회원만이고, 소비 이력은 여기서만 붙습니다. 리포트는 두 층을 구분해 표기하고, 5명 미만 셀은 표시하지 않습니다. (50초)</a:t>
             </a:r>
             <a:endParaRPr lang="en-US" dirty="0"/>
           </a:p>
@@ -2134,7 +2135,7 @@
           <a:p>
             <a:r>
               <a:rPr lang="en-US" dirty="0"/>
-              <a:t>아홉 번째, 비용 구조. 가장 큰 항목은 인건비입니다. 그리고 이건 의도된 구조입니다 - 처방과 검증이 상품이니 컨설턴트에 씁니다. 반대로 경쟁사의 가장 큰 비용은 클라우드입니다. 영상을 전부 올리니 매장이 늘수록 비용이 그대로 따라 올라갑니다. 저희는 카메라 단에서 분석을 끝내고 숫자만 보냅니다. 클라우드 비용이 10분의 1이 되고, 매장이 10배 늘어도 비용은 10배 늘지 않습니다. 변동비는 팝업 건당 75만원 수준이라 매출총이익률 77%가 나옵니다. (40초)</a:t>
+              <a:t>아홉 번째, 비용 구조. 가장 큰 항목은 인건비입니다. 그리고 이건 의도된 구조입니다 - 처방과 검증이 상품이니 컨설턴트에 씁니다. 반대로 경쟁사의 가장 큰 비용은 클라우드입니다. 영상을 전부 올리니 매장이 늘수록 비용이 그대로 따라 올라갑니다. 저희는 카메라 단에서 분석을 끝내고 숫자만 보냅니다. 클라우드 비용이 10분의 1이 되고, 매장이 10배 늘어도 비용은 10배 늘지 않습니다. 변동비는 팝업 건당 75만원 수준이라 매출총이익률 77%가 나옵니다. (35초)</a:t>
             </a:r>
             <a:endParaRPr lang="en-US" dirty="0"/>
           </a:p>
@@ -6302,11 +6303,11 @@
         <p:spPr>
           <a:xfrm>
             <a:off x="548640" y="4956048"/>
-            <a:ext cx="3529584" cy="1188720"/>
+            <a:ext cx="3529584" cy="1389888"/>
           </a:xfrm>
           <a:prstGeom prst="roundRect">
             <a:avLst>
-              <a:gd name="adj" fmla="val 3846"/>
+              <a:gd name="adj" fmla="val 3289"/>
             </a:avLst>
           </a:prstGeom>
           <a:solidFill>
@@ -6328,8 +6329,8 @@
         </p:nvSpPr>
         <p:spPr>
           <a:xfrm>
-            <a:off x="804672" y="5047488"/>
-            <a:ext cx="3017520" cy="292608"/>
+            <a:off x="804672" y="5029200"/>
+            <a:ext cx="3017520" cy="274320"/>
           </a:xfrm>
           <a:prstGeom prst="rect">
             <a:avLst/>
@@ -6367,8 +6368,8 @@
         </p:nvSpPr>
         <p:spPr>
           <a:xfrm>
-            <a:off x="804672" y="5358384"/>
-            <a:ext cx="3017520" cy="731520"/>
+            <a:off x="804672" y="5303520"/>
+            <a:ext cx="3017520" cy="658368"/>
           </a:xfrm>
           <a:prstGeom prst="rect">
             <a:avLst/>
@@ -6382,12 +6383,12 @@
           <a:p>
             <a:pPr indent="0" marL="0">
               <a:lnSpc>
-                <a:spcPts val="1600"/>
+                <a:spcPts val="1500"/>
               </a:lnSpc>
               <a:buNone/>
             </a:pPr>
             <a:r>
-              <a:rPr lang="en-US" sz="1100" dirty="0">
+              <a:rPr lang="en-US" sz="1050" dirty="0">
                 <a:solidFill>
                   <a:srgbClr val="101420"/>
                 </a:solidFill>
@@ -6395,26 +6396,85 @@
                 <a:ea typeface="맑은 고딕" pitchFamily="34" charset="-122"/>
                 <a:cs typeface="맑은 고딕" pitchFamily="34" charset="-120"/>
               </a:rPr>
-              <a:t>완전 익명 — 영상은 카메라 안에서 좌표·숫자로 변환, 원본 미저장</a:t>
-            </a:r>
-            <a:endParaRPr lang="en-US" sz="1100" dirty="0"/>
-          </a:p>
-        </p:txBody>
-      </p:sp>
-      <p:sp>
-        <p:nvSpPr>
-          <p:cNvPr id="23" name="Shape 21"/>
+              <a:t>완전 익명 — 원본 미저장, 카메라 안에서 좌표·숫자로 변환.</a:t>
+            </a:r>
+            <a:endParaRPr lang="en-US" sz="1050" dirty="0"/>
+          </a:p>
+          <a:p>
+            <a:pPr indent="0" marL="0">
+              <a:lnSpc>
+                <a:spcPts val="1500"/>
+              </a:lnSpc>
+              <a:buNone/>
+            </a:pPr>
+            <a:r>
+              <a:rPr lang="en-US" sz="1050" dirty="0">
+                <a:solidFill>
+                  <a:srgbClr val="101420"/>
+                </a:solidFill>
+                <a:latin typeface="맑은 고딕" pitchFamily="34" charset="0"/>
+                <a:ea typeface="맑은 고딕" pitchFamily="34" charset="-122"/>
+                <a:cs typeface="맑은 고딕" pitchFamily="34" charset="-120"/>
+              </a:rPr>
+              <a:t>연령대·성별은 특징값 없이 속성값만 추출</a:t>
+            </a:r>
+            <a:endParaRPr lang="en-US" sz="1050" dirty="0"/>
+          </a:p>
+        </p:txBody>
+      </p:sp>
+      <p:sp>
+        <p:nvSpPr>
+          <p:cNvPr id="23" name="Text 21"/>
+          <p:cNvSpPr txBox="1"/>
+          <p:nvPr/>
+        </p:nvSpPr>
+        <p:spPr>
+          <a:xfrm>
+            <a:off x="804672" y="5998464"/>
+            <a:ext cx="3017520" cy="256032"/>
+          </a:xfrm>
+          <a:prstGeom prst="rect">
+            <a:avLst/>
+          </a:prstGeom>
+          <a:noFill/>
+          <a:ln/>
+        </p:spPr>
+        <p:txBody>
+          <a:bodyPr wrap="square" lIns="0" tIns="0" rIns="0" bIns="0" rtlCol="0" anchor="ctr"/>
+          <a:lstStyle/>
+          <a:p>
+            <a:pPr indent="0" marL="0">
+              <a:buNone/>
+            </a:pPr>
+            <a:r>
+              <a:rPr lang="en-US" sz="1050" b="1" dirty="0">
+                <a:solidFill>
+                  <a:srgbClr val="E11D2E"/>
+                </a:solidFill>
+                <a:latin typeface="맑은 고딕" pitchFamily="34" charset="0"/>
+                <a:ea typeface="맑은 고딕" pitchFamily="34" charset="-122"/>
+                <a:cs typeface="맑은 고딕" pitchFamily="34" charset="-120"/>
+              </a:rPr>
+              <a:t>커버리지 = 방문자 100% (비회원 포함)</a:t>
+            </a:r>
+            <a:endParaRPr lang="en-US" sz="1050" dirty="0"/>
+          </a:p>
+        </p:txBody>
+      </p:sp>
+      <p:sp>
+        <p:nvSpPr>
+          <p:cNvPr id="24" name="Shape 22"/>
           <p:cNvSpPr/>
           <p:nvPr/>
         </p:nvSpPr>
         <p:spPr>
           <a:xfrm>
             <a:off x="4270248" y="4956048"/>
-            <a:ext cx="3529584" cy="1188720"/>
+            <a:ext cx="3529584" cy="1389888"/>
           </a:xfrm>
           <a:prstGeom prst="roundRect">
             <a:avLst>
-              <a:gd name="adj" fmla="val 3846"/>
+              <a:gd name="adj" fmla="val 3289"/>
             </a:avLst>
           </a:prstGeom>
           <a:solidFill>
@@ -6430,14 +6490,14 @@
       </p:sp>
       <p:sp>
         <p:nvSpPr>
-          <p:cNvPr id="24" name="Text 22"/>
-          <p:cNvSpPr txBox="1"/>
-          <p:nvPr/>
-        </p:nvSpPr>
-        <p:spPr>
-          <a:xfrm>
-            <a:off x="4526280" y="5047488"/>
-            <a:ext cx="3017520" cy="292608"/>
+          <p:cNvPr id="25" name="Text 23"/>
+          <p:cNvSpPr txBox="1"/>
+          <p:nvPr/>
+        </p:nvSpPr>
+        <p:spPr>
+          <a:xfrm>
+            <a:off x="4526280" y="5029200"/>
+            <a:ext cx="3017520" cy="274320"/>
           </a:xfrm>
           <a:prstGeom prst="rect">
             <a:avLst/>
@@ -6469,14 +6529,14 @@
       </p:sp>
       <p:sp>
         <p:nvSpPr>
-          <p:cNvPr id="25" name="Text 23"/>
-          <p:cNvSpPr txBox="1"/>
-          <p:nvPr/>
-        </p:nvSpPr>
-        <p:spPr>
-          <a:xfrm>
-            <a:off x="4526280" y="5358384"/>
-            <a:ext cx="3017520" cy="731520"/>
+          <p:cNvPr id="26" name="Text 24"/>
+          <p:cNvSpPr txBox="1"/>
+          <p:nvPr/>
+        </p:nvSpPr>
+        <p:spPr>
+          <a:xfrm>
+            <a:off x="4526280" y="5303520"/>
+            <a:ext cx="3017520" cy="658368"/>
           </a:xfrm>
           <a:prstGeom prst="rect">
             <a:avLst/>
@@ -6490,12 +6550,12 @@
           <a:p>
             <a:pPr indent="0" marL="0">
               <a:lnSpc>
-                <a:spcPts val="1600"/>
+                <a:spcPts val="1500"/>
               </a:lnSpc>
               <a:buNone/>
             </a:pPr>
             <a:r>
-              <a:rPr lang="en-US" sz="1100" dirty="0">
+              <a:rPr lang="en-US" sz="1050" dirty="0">
                 <a:solidFill>
                   <a:srgbClr val="101420"/>
                 </a:solidFill>
@@ -6503,26 +6563,85 @@
                 <a:ea typeface="맑은 고딕" pitchFamily="34" charset="-122"/>
                 <a:cs typeface="맑은 고딕" pitchFamily="34" charset="-120"/>
               </a:rPr>
-              <a:t>동의 기반 — L.POINT 앱 체크인·QR·결제 적립 시에만 연결</a:t>
-            </a:r>
-            <a:endParaRPr lang="en-US" sz="1100" dirty="0"/>
-          </a:p>
-        </p:txBody>
-      </p:sp>
-      <p:sp>
-        <p:nvSpPr>
-          <p:cNvPr id="26" name="Shape 24"/>
+              <a:t>동의 기반 — L.POINT 앱 체크인·QR·결제 적립 시에만 연결.</a:t>
+            </a:r>
+            <a:endParaRPr lang="en-US" sz="1050" dirty="0"/>
+          </a:p>
+          <a:p>
+            <a:pPr indent="0" marL="0">
+              <a:lnSpc>
+                <a:spcPts val="1500"/>
+              </a:lnSpc>
+              <a:buNone/>
+            </a:pPr>
+            <a:r>
+              <a:rPr lang="en-US" sz="1050" dirty="0">
+                <a:solidFill>
+                  <a:srgbClr val="101420"/>
+                </a:solidFill>
+                <a:latin typeface="맑은 고딕" pitchFamily="34" charset="0"/>
+                <a:ea typeface="맑은 고딕" pitchFamily="34" charset="-122"/>
+                <a:cs typeface="맑은 고딕" pitchFamily="34" charset="-120"/>
+              </a:rPr>
+              <a:t>여기서만 소비 이력·교차구매가 붙습니다</a:t>
+            </a:r>
+            <a:endParaRPr lang="en-US" sz="1050" dirty="0"/>
+          </a:p>
+        </p:txBody>
+      </p:sp>
+      <p:sp>
+        <p:nvSpPr>
+          <p:cNvPr id="27" name="Text 25"/>
+          <p:cNvSpPr txBox="1"/>
+          <p:nvPr/>
+        </p:nvSpPr>
+        <p:spPr>
+          <a:xfrm>
+            <a:off x="4526280" y="5998464"/>
+            <a:ext cx="3017520" cy="256032"/>
+          </a:xfrm>
+          <a:prstGeom prst="rect">
+            <a:avLst/>
+          </a:prstGeom>
+          <a:noFill/>
+          <a:ln/>
+        </p:spPr>
+        <p:txBody>
+          <a:bodyPr wrap="square" lIns="0" tIns="0" rIns="0" bIns="0" rtlCol="0" anchor="ctr"/>
+          <a:lstStyle/>
+          <a:p>
+            <a:pPr indent="0" marL="0">
+              <a:buNone/>
+            </a:pPr>
+            <a:r>
+              <a:rPr lang="en-US" sz="1050" b="1" dirty="0">
+                <a:solidFill>
+                  <a:srgbClr val="E11D2E"/>
+                </a:solidFill>
+                <a:latin typeface="맑은 고딕" pitchFamily="34" charset="0"/>
+                <a:ea typeface="맑은 고딕" pitchFamily="34" charset="-122"/>
+                <a:cs typeface="맑은 고딕" pitchFamily="34" charset="-120"/>
+              </a:rPr>
+              <a:t>커버리지 = 동의 회원</a:t>
+            </a:r>
+            <a:endParaRPr lang="en-US" sz="1050" dirty="0"/>
+          </a:p>
+        </p:txBody>
+      </p:sp>
+      <p:sp>
+        <p:nvSpPr>
+          <p:cNvPr id="28" name="Shape 26"/>
           <p:cNvSpPr/>
           <p:nvPr/>
         </p:nvSpPr>
         <p:spPr>
           <a:xfrm>
             <a:off x="7991856" y="4956048"/>
-            <a:ext cx="3529584" cy="1188720"/>
+            <a:ext cx="3529584" cy="1389888"/>
           </a:xfrm>
           <a:prstGeom prst="roundRect">
             <a:avLst>
-              <a:gd name="adj" fmla="val 3846"/>
+              <a:gd name="adj" fmla="val 3289"/>
             </a:avLst>
           </a:prstGeom>
           <a:solidFill>
@@ -6538,14 +6657,14 @@
       </p:sp>
       <p:sp>
         <p:nvSpPr>
-          <p:cNvPr id="27" name="Text 25"/>
-          <p:cNvSpPr txBox="1"/>
-          <p:nvPr/>
-        </p:nvSpPr>
-        <p:spPr>
-          <a:xfrm>
-            <a:off x="8247888" y="5047488"/>
-            <a:ext cx="3017520" cy="292608"/>
+          <p:cNvPr id="29" name="Text 27"/>
+          <p:cNvSpPr txBox="1"/>
+          <p:nvPr/>
+        </p:nvSpPr>
+        <p:spPr>
+          <a:xfrm>
+            <a:off x="8247888" y="5029200"/>
+            <a:ext cx="3017520" cy="274320"/>
           </a:xfrm>
           <a:prstGeom prst="rect">
             <a:avLst/>
@@ -6577,14 +6696,14 @@
       </p:sp>
       <p:sp>
         <p:nvSpPr>
-          <p:cNvPr id="28" name="Text 26"/>
-          <p:cNvSpPr txBox="1"/>
-          <p:nvPr/>
-        </p:nvSpPr>
-        <p:spPr>
-          <a:xfrm>
-            <a:off x="8247888" y="5358384"/>
-            <a:ext cx="3017520" cy="731520"/>
+          <p:cNvPr id="30" name="Text 28"/>
+          <p:cNvSpPr txBox="1"/>
+          <p:nvPr/>
+        </p:nvSpPr>
+        <p:spPr>
+          <a:xfrm>
+            <a:off x="8247888" y="5303520"/>
+            <a:ext cx="3017520" cy="658368"/>
           </a:xfrm>
           <a:prstGeom prst="rect">
             <a:avLst/>
@@ -6598,12 +6717,12 @@
           <a:p>
             <a:pPr indent="0" marL="0">
               <a:lnSpc>
-                <a:spcPts val="1600"/>
+                <a:spcPts val="1500"/>
               </a:lnSpc>
               <a:buNone/>
             </a:pPr>
             <a:r>
-              <a:rPr lang="en-US" sz="1100" dirty="0">
+              <a:rPr lang="en-US" sz="1050" dirty="0">
                 <a:solidFill>
                   <a:srgbClr val="101420"/>
                 </a:solidFill>
@@ -6613,7 +6732,46 @@
               </a:rPr>
               <a:t>개인 단위가 아니라 시간대 × 구역 × 세그먼트 집계 단위로만</a:t>
             </a:r>
-            <a:endParaRPr lang="en-US" sz="1100" dirty="0"/>
+            <a:endParaRPr lang="en-US" sz="1050" dirty="0"/>
+          </a:p>
+        </p:txBody>
+      </p:sp>
+      <p:sp>
+        <p:nvSpPr>
+          <p:cNvPr id="31" name="Text 29"/>
+          <p:cNvSpPr txBox="1"/>
+          <p:nvPr/>
+        </p:nvSpPr>
+        <p:spPr>
+          <a:xfrm>
+            <a:off x="8247888" y="5998464"/>
+            <a:ext cx="3017520" cy="256032"/>
+          </a:xfrm>
+          <a:prstGeom prst="rect">
+            <a:avLst/>
+          </a:prstGeom>
+          <a:noFill/>
+          <a:ln/>
+        </p:spPr>
+        <p:txBody>
+          <a:bodyPr wrap="square" lIns="0" tIns="0" rIns="0" bIns="0" rtlCol="0" anchor="ctr"/>
+          <a:lstStyle/>
+          <a:p>
+            <a:pPr indent="0" marL="0">
+              <a:buNone/>
+            </a:pPr>
+            <a:r>
+              <a:rPr lang="en-US" sz="1050" b="1" dirty="0">
+                <a:solidFill>
+                  <a:srgbClr val="E11D2E"/>
+                </a:solidFill>
+                <a:latin typeface="맑은 고딕" pitchFamily="34" charset="0"/>
+                <a:ea typeface="맑은 고딕" pitchFamily="34" charset="-122"/>
+                <a:cs typeface="맑은 고딕" pitchFamily="34" charset="-120"/>
+              </a:rPr>
+              <a:t>최소 집계 5명 미만 셀은 미표시</a:t>
+            </a:r>
+            <a:endParaRPr lang="en-US" sz="1050" dirty="0"/>
           </a:p>
         </p:txBody>
       </p:sp>

--- a/LGA_롯데신사업_발표.pptx
+++ b/LGA_롯데신사업_발표.pptx
@@ -4962,7 +4962,7 @@
         </p:nvSpPr>
         <p:spPr>
           <a:xfrm>
-            <a:off x="841248" y="1700784"/>
+            <a:off x="841248" y="1872996"/>
             <a:ext cx="4905756" cy="306832"/>
           </a:xfrm>
           <a:prstGeom prst="rect">
@@ -5004,7 +5004,7 @@
         </p:nvSpPr>
         <p:spPr>
           <a:xfrm>
-            <a:off x="841248" y="2117344"/>
+            <a:off x="841248" y="2289556"/>
             <a:ext cx="4905756" cy="967232"/>
           </a:xfrm>
           <a:prstGeom prst="rect">
@@ -5132,7 +5132,7 @@
         </p:nvSpPr>
         <p:spPr>
           <a:xfrm>
-            <a:off x="6441948" y="1700784"/>
+            <a:off x="6441948" y="1872996"/>
             <a:ext cx="4905756" cy="306832"/>
           </a:xfrm>
           <a:prstGeom prst="rect">
@@ -5174,7 +5174,7 @@
         </p:nvSpPr>
         <p:spPr>
           <a:xfrm>
-            <a:off x="6441948" y="2117344"/>
+            <a:off x="6441948" y="2289556"/>
             <a:ext cx="4905756" cy="967232"/>
           </a:xfrm>
           <a:prstGeom prst="rect">
@@ -5302,7 +5302,7 @@
         </p:nvSpPr>
         <p:spPr>
           <a:xfrm>
-            <a:off x="841248" y="4014216"/>
+            <a:off x="841248" y="4186428"/>
             <a:ext cx="4905756" cy="306832"/>
           </a:xfrm>
           <a:prstGeom prst="rect">
@@ -5344,7 +5344,7 @@
         </p:nvSpPr>
         <p:spPr>
           <a:xfrm>
-            <a:off x="841248" y="4430776"/>
+            <a:off x="841248" y="4602988"/>
             <a:ext cx="4905756" cy="967232"/>
           </a:xfrm>
           <a:prstGeom prst="rect">
@@ -5472,7 +5472,7 @@
         </p:nvSpPr>
         <p:spPr>
           <a:xfrm>
-            <a:off x="6441948" y="4014216"/>
+            <a:off x="6441948" y="4186428"/>
             <a:ext cx="4905756" cy="306832"/>
           </a:xfrm>
           <a:prstGeom prst="rect">
@@ -5514,7 +5514,7 @@
         </p:nvSpPr>
         <p:spPr>
           <a:xfrm>
-            <a:off x="6441948" y="4430776"/>
+            <a:off x="6441948" y="4602988"/>
             <a:ext cx="4905756" cy="967232"/>
           </a:xfrm>
           <a:prstGeom prst="rect">
@@ -5899,7 +5899,7 @@
         </p:nvSpPr>
         <p:spPr>
           <a:xfrm>
-            <a:off x="841248" y="1700784"/>
+            <a:off x="841248" y="1859720"/>
             <a:ext cx="3038856" cy="306832"/>
           </a:xfrm>
           <a:prstGeom prst="rect">
@@ -5941,7 +5941,7 @@
         </p:nvSpPr>
         <p:spPr>
           <a:xfrm>
-            <a:off x="841248" y="2117344"/>
+            <a:off x="841248" y="2276280"/>
             <a:ext cx="3038856" cy="217932"/>
           </a:xfrm>
           <a:prstGeom prst="rect">
@@ -5983,7 +5983,7 @@
         </p:nvSpPr>
         <p:spPr>
           <a:xfrm>
-            <a:off x="841248" y="2426716"/>
+            <a:off x="841248" y="2585652"/>
             <a:ext cx="3038856" cy="764032"/>
           </a:xfrm>
           <a:prstGeom prst="rect">
@@ -6087,7 +6087,7 @@
         </p:nvSpPr>
         <p:spPr>
           <a:xfrm>
-            <a:off x="4575048" y="1700784"/>
+            <a:off x="4575048" y="1859720"/>
             <a:ext cx="3038856" cy="306832"/>
           </a:xfrm>
           <a:prstGeom prst="rect">
@@ -6129,7 +6129,7 @@
         </p:nvSpPr>
         <p:spPr>
           <a:xfrm>
-            <a:off x="4575048" y="2117344"/>
+            <a:off x="4575048" y="2276280"/>
             <a:ext cx="3038856" cy="217932"/>
           </a:xfrm>
           <a:prstGeom prst="rect">
@@ -6171,7 +6171,7 @@
         </p:nvSpPr>
         <p:spPr>
           <a:xfrm>
-            <a:off x="4575048" y="2426716"/>
+            <a:off x="4575048" y="2585652"/>
             <a:ext cx="3038856" cy="764032"/>
           </a:xfrm>
           <a:prstGeom prst="rect">
@@ -6275,7 +6275,7 @@
         </p:nvSpPr>
         <p:spPr>
           <a:xfrm>
-            <a:off x="8308848" y="1700784"/>
+            <a:off x="8308848" y="1859720"/>
             <a:ext cx="3038856" cy="306832"/>
           </a:xfrm>
           <a:prstGeom prst="rect">
@@ -6317,7 +6317,7 @@
         </p:nvSpPr>
         <p:spPr>
           <a:xfrm>
-            <a:off x="8308848" y="2117344"/>
+            <a:off x="8308848" y="2276280"/>
             <a:ext cx="3038856" cy="217932"/>
           </a:xfrm>
           <a:prstGeom prst="rect">
@@ -6359,7 +6359,7 @@
         </p:nvSpPr>
         <p:spPr>
           <a:xfrm>
-            <a:off x="8308848" y="2426716"/>
+            <a:off x="8308848" y="2585652"/>
             <a:ext cx="3038856" cy="764032"/>
           </a:xfrm>
           <a:prstGeom prst="rect">
@@ -6498,7 +6498,7 @@
         </p:nvSpPr>
         <p:spPr>
           <a:xfrm>
-            <a:off x="841248" y="4413876"/>
+            <a:off x="841248" y="4553390"/>
             <a:ext cx="3038856" cy="205232"/>
           </a:xfrm>
           <a:prstGeom prst="rect">
@@ -6540,7 +6540,7 @@
         </p:nvSpPr>
         <p:spPr>
           <a:xfrm>
-            <a:off x="841248" y="4728836"/>
+            <a:off x="841248" y="4868350"/>
             <a:ext cx="3038856" cy="408432"/>
           </a:xfrm>
           <a:prstGeom prst="rect">
@@ -6651,7 +6651,7 @@
         </p:nvSpPr>
         <p:spPr>
           <a:xfrm>
-            <a:off x="4575048" y="4413876"/>
+            <a:off x="4575048" y="4553390"/>
             <a:ext cx="3038856" cy="205232"/>
           </a:xfrm>
           <a:prstGeom prst="rect">
@@ -6693,7 +6693,7 @@
         </p:nvSpPr>
         <p:spPr>
           <a:xfrm>
-            <a:off x="4575048" y="4728836"/>
+            <a:off x="4575048" y="4868350"/>
             <a:ext cx="3038856" cy="598932"/>
           </a:xfrm>
           <a:prstGeom prst="rect">
@@ -6804,7 +6804,7 @@
         </p:nvSpPr>
         <p:spPr>
           <a:xfrm>
-            <a:off x="8308848" y="4413876"/>
+            <a:off x="8308848" y="4553390"/>
             <a:ext cx="3038856" cy="205232"/>
           </a:xfrm>
           <a:prstGeom prst="rect">
@@ -6846,7 +6846,7 @@
         </p:nvSpPr>
         <p:spPr>
           <a:xfrm>
-            <a:off x="8308848" y="4728836"/>
+            <a:off x="8308848" y="4868350"/>
             <a:ext cx="3038856" cy="408432"/>
           </a:xfrm>
           <a:prstGeom prst="rect">
@@ -7188,11 +7188,11 @@
         <p:spPr>
           <a:xfrm>
             <a:off x="566928" y="1792224"/>
-            <a:ext cx="3587496" cy="2001123"/>
+            <a:ext cx="3587496" cy="1928470"/>
           </a:xfrm>
           <a:prstGeom prst="roundRect">
             <a:avLst>
-              <a:gd name="adj" fmla="val 2742"/>
+              <a:gd name="adj" fmla="val 2845"/>
             </a:avLst>
           </a:prstGeom>
           <a:solidFill>
@@ -7221,7 +7221,7 @@
         </p:nvSpPr>
         <p:spPr>
           <a:xfrm>
-            <a:off x="841248" y="2011680"/>
+            <a:off x="841248" y="2261667"/>
             <a:ext cx="3038856" cy="306832"/>
           </a:xfrm>
           <a:prstGeom prst="rect">
@@ -7263,7 +7263,7 @@
         </p:nvSpPr>
         <p:spPr>
           <a:xfrm>
-            <a:off x="841248" y="2428240"/>
+            <a:off x="841248" y="2678227"/>
             <a:ext cx="3038856" cy="217932"/>
           </a:xfrm>
           <a:prstGeom prst="rect">
@@ -7305,7 +7305,7 @@
         </p:nvSpPr>
         <p:spPr>
           <a:xfrm>
-            <a:off x="841248" y="3383391"/>
+            <a:off x="841248" y="3310738"/>
             <a:ext cx="3038856" cy="217932"/>
           </a:xfrm>
           <a:prstGeom prst="rect">
@@ -7348,11 +7348,11 @@
         <p:spPr>
           <a:xfrm>
             <a:off x="4300728" y="1792224"/>
-            <a:ext cx="3587496" cy="2001123"/>
+            <a:ext cx="3587496" cy="1928470"/>
           </a:xfrm>
           <a:prstGeom prst="roundRect">
             <a:avLst>
-              <a:gd name="adj" fmla="val 2742"/>
+              <a:gd name="adj" fmla="val 2845"/>
             </a:avLst>
           </a:prstGeom>
           <a:solidFill>
@@ -7381,7 +7381,7 @@
         </p:nvSpPr>
         <p:spPr>
           <a:xfrm>
-            <a:off x="4575048" y="2011680"/>
+            <a:off x="4575048" y="2261667"/>
             <a:ext cx="3038856" cy="306832"/>
           </a:xfrm>
           <a:prstGeom prst="rect">
@@ -7423,7 +7423,7 @@
         </p:nvSpPr>
         <p:spPr>
           <a:xfrm>
-            <a:off x="4575048" y="2428240"/>
+            <a:off x="4575048" y="2678227"/>
             <a:ext cx="3038856" cy="217932"/>
           </a:xfrm>
           <a:prstGeom prst="rect">
@@ -7465,7 +7465,7 @@
         </p:nvSpPr>
         <p:spPr>
           <a:xfrm>
-            <a:off x="4575048" y="3383391"/>
+            <a:off x="4575048" y="3310738"/>
             <a:ext cx="3038856" cy="217932"/>
           </a:xfrm>
           <a:prstGeom prst="rect">
@@ -7508,11 +7508,11 @@
         <p:spPr>
           <a:xfrm>
             <a:off x="8034528" y="1792224"/>
-            <a:ext cx="3587496" cy="2001123"/>
+            <a:ext cx="3587496" cy="1928470"/>
           </a:xfrm>
           <a:prstGeom prst="roundRect">
             <a:avLst>
-              <a:gd name="adj" fmla="val 2742"/>
+              <a:gd name="adj" fmla="val 2845"/>
             </a:avLst>
           </a:prstGeom>
           <a:solidFill>
@@ -7541,7 +7541,7 @@
         </p:nvSpPr>
         <p:spPr>
           <a:xfrm>
-            <a:off x="8308848" y="2011680"/>
+            <a:off x="8308848" y="2261667"/>
             <a:ext cx="3038856" cy="306832"/>
           </a:xfrm>
           <a:prstGeom prst="rect">
@@ -7583,7 +7583,7 @@
         </p:nvSpPr>
         <p:spPr>
           <a:xfrm>
-            <a:off x="8308848" y="2428240"/>
+            <a:off x="8308848" y="2678227"/>
             <a:ext cx="3038856" cy="217932"/>
           </a:xfrm>
           <a:prstGeom prst="rect">
@@ -7625,7 +7625,7 @@
         </p:nvSpPr>
         <p:spPr>
           <a:xfrm>
-            <a:off x="8308848" y="3383391"/>
+            <a:off x="8308848" y="3310738"/>
             <a:ext cx="3038856" cy="217932"/>
           </a:xfrm>
           <a:prstGeom prst="rect">
@@ -7667,7 +7667,7 @@
         </p:nvSpPr>
         <p:spPr>
           <a:xfrm>
-            <a:off x="4154424" y="2536754"/>
+            <a:off x="4154424" y="2500427"/>
             <a:ext cx="146304" cy="512064"/>
           </a:xfrm>
           <a:prstGeom prst="rect">
@@ -7709,7 +7709,7 @@
         </p:nvSpPr>
         <p:spPr>
           <a:xfrm>
-            <a:off x="7888224" y="2536754"/>
+            <a:off x="7888224" y="2500427"/>
             <a:ext cx="146304" cy="512064"/>
           </a:xfrm>
           <a:prstGeom prst="rect">
@@ -7751,7 +7751,7 @@
         </p:nvSpPr>
         <p:spPr>
           <a:xfrm>
-            <a:off x="566928" y="3976227"/>
+            <a:off x="566928" y="3903574"/>
             <a:ext cx="4572000" cy="268732"/>
           </a:xfrm>
           <a:prstGeom prst="rect">
@@ -7793,12 +7793,12 @@
         </p:nvSpPr>
         <p:spPr>
           <a:xfrm>
-            <a:off x="566928" y="4305411"/>
-            <a:ext cx="3587496" cy="1638189"/>
+            <a:off x="566928" y="4232758"/>
+            <a:ext cx="3587496" cy="1578712"/>
           </a:xfrm>
           <a:prstGeom prst="roundRect">
             <a:avLst>
-              <a:gd name="adj" fmla="val 3349"/>
+              <a:gd name="adj" fmla="val 3475"/>
             </a:avLst>
           </a:prstGeom>
           <a:solidFill>
@@ -7827,7 +7827,7 @@
         </p:nvSpPr>
         <p:spPr>
           <a:xfrm>
-            <a:off x="841248" y="4524867"/>
+            <a:off x="841248" y="4656861"/>
             <a:ext cx="3038856" cy="230632"/>
           </a:xfrm>
           <a:prstGeom prst="rect">
@@ -7869,7 +7869,7 @@
         </p:nvSpPr>
         <p:spPr>
           <a:xfrm>
-            <a:off x="841248" y="4865227"/>
+            <a:off x="841248" y="4997221"/>
             <a:ext cx="3038856" cy="408432"/>
           </a:xfrm>
           <a:prstGeom prst="rect">
@@ -7911,12 +7911,12 @@
         </p:nvSpPr>
         <p:spPr>
           <a:xfrm>
-            <a:off x="4300728" y="4305411"/>
-            <a:ext cx="3587496" cy="1638189"/>
+            <a:off x="4300728" y="4232758"/>
+            <a:ext cx="3587496" cy="1578712"/>
           </a:xfrm>
           <a:prstGeom prst="roundRect">
             <a:avLst>
-              <a:gd name="adj" fmla="val 3349"/>
+              <a:gd name="adj" fmla="val 3475"/>
             </a:avLst>
           </a:prstGeom>
           <a:solidFill>
@@ -7945,7 +7945,7 @@
         </p:nvSpPr>
         <p:spPr>
           <a:xfrm>
-            <a:off x="4575048" y="4524867"/>
+            <a:off x="4575048" y="4656861"/>
             <a:ext cx="3038856" cy="230632"/>
           </a:xfrm>
           <a:prstGeom prst="rect">
@@ -7987,7 +7987,7 @@
         </p:nvSpPr>
         <p:spPr>
           <a:xfrm>
-            <a:off x="4575048" y="4865227"/>
+            <a:off x="4575048" y="4997221"/>
             <a:ext cx="3038856" cy="217932"/>
           </a:xfrm>
           <a:prstGeom prst="rect">
@@ -8029,12 +8029,12 @@
         </p:nvSpPr>
         <p:spPr>
           <a:xfrm>
-            <a:off x="8034528" y="4305411"/>
-            <a:ext cx="3587496" cy="1638189"/>
+            <a:off x="8034528" y="4232758"/>
+            <a:ext cx="3587496" cy="1578712"/>
           </a:xfrm>
           <a:prstGeom prst="roundRect">
             <a:avLst>
-              <a:gd name="adj" fmla="val 3349"/>
+              <a:gd name="adj" fmla="val 3475"/>
             </a:avLst>
           </a:prstGeom>
           <a:solidFill>
@@ -8063,7 +8063,7 @@
         </p:nvSpPr>
         <p:spPr>
           <a:xfrm>
-            <a:off x="8308848" y="4524867"/>
+            <a:off x="8308848" y="4656861"/>
             <a:ext cx="3038856" cy="230632"/>
           </a:xfrm>
           <a:prstGeom prst="rect">
@@ -8105,7 +8105,7 @@
         </p:nvSpPr>
         <p:spPr>
           <a:xfrm>
-            <a:off x="8308848" y="4865227"/>
+            <a:off x="8308848" y="4997221"/>
             <a:ext cx="3038856" cy="217932"/>
           </a:xfrm>
           <a:prstGeom prst="rect">
@@ -13110,11 +13110,11 @@
         <p:spPr>
           <a:xfrm>
             <a:off x="566928" y="1481328"/>
-            <a:ext cx="3587496" cy="1801368"/>
+            <a:ext cx="3587496" cy="1613581"/>
           </a:xfrm>
           <a:prstGeom prst="roundRect">
             <a:avLst>
-              <a:gd name="adj" fmla="val 3046"/>
+              <a:gd name="adj" fmla="val 3400"/>
             </a:avLst>
           </a:prstGeom>
           <a:solidFill>
@@ -13143,7 +13143,7 @@
         </p:nvSpPr>
         <p:spPr>
           <a:xfrm>
-            <a:off x="841248" y="1700784"/>
+            <a:off x="841248" y="1714841"/>
             <a:ext cx="3038856" cy="243332"/>
           </a:xfrm>
           <a:prstGeom prst="rect">
@@ -13185,7 +13185,7 @@
         </p:nvSpPr>
         <p:spPr>
           <a:xfrm>
-            <a:off x="841248" y="2017268"/>
+            <a:off x="841248" y="2031325"/>
             <a:ext cx="3038856" cy="306832"/>
           </a:xfrm>
           <a:prstGeom prst="rect">
@@ -13227,8 +13227,8 @@
         </p:nvSpPr>
         <p:spPr>
           <a:xfrm>
-            <a:off x="841248" y="2433828"/>
-            <a:ext cx="3038856" cy="675132"/>
+            <a:off x="841248" y="2447885"/>
+            <a:ext cx="3038856" cy="459232"/>
           </a:xfrm>
           <a:prstGeom prst="rect">
             <a:avLst/>
@@ -13255,7 +13255,7 @@
                 <a:ea typeface="Pretendard" pitchFamily="34" charset="-122"/>
                 <a:cs typeface="Pretendard" pitchFamily="34" charset="-120"/>
               </a:rPr>
-              <a:t>고객의 '평생 가치'는 지금까지 결제한 순간에만 기록됐습니다. L.GA는 사지 않은 순간까지 가치로 바꿉니다.</a:t>
+              <a:t>고객의 '평생 가치'가 결제 순간에만 기록돼 왔습니다. 사지 않은 순간까지 넓힙니다.</a:t>
             </a:r>
             <a:endParaRPr lang="en-US" sz="1150" dirty="0"/>
           </a:p>
@@ -13270,11 +13270,11 @@
         <p:spPr>
           <a:xfrm>
             <a:off x="4300728" y="1481328"/>
-            <a:ext cx="3587496" cy="1801368"/>
+            <a:ext cx="3587496" cy="1613581"/>
           </a:xfrm>
           <a:prstGeom prst="roundRect">
             <a:avLst>
-              <a:gd name="adj" fmla="val 3046"/>
+              <a:gd name="adj" fmla="val 3400"/>
             </a:avLst>
           </a:prstGeom>
           <a:solidFill>
@@ -13303,7 +13303,7 @@
         </p:nvSpPr>
         <p:spPr>
           <a:xfrm>
-            <a:off x="4575048" y="1700784"/>
+            <a:off x="4575048" y="1714841"/>
             <a:ext cx="3038856" cy="243332"/>
           </a:xfrm>
           <a:prstGeom prst="rect">
@@ -13345,7 +13345,7 @@
         </p:nvSpPr>
         <p:spPr>
           <a:xfrm>
-            <a:off x="4575048" y="2017268"/>
+            <a:off x="4575048" y="2031325"/>
             <a:ext cx="3038856" cy="306832"/>
           </a:xfrm>
           <a:prstGeom prst="rect">
@@ -13387,8 +13387,8 @@
         </p:nvSpPr>
         <p:spPr>
           <a:xfrm>
-            <a:off x="4575048" y="2433828"/>
-            <a:ext cx="3038856" cy="675132"/>
+            <a:off x="4575048" y="2447885"/>
+            <a:ext cx="3038856" cy="459232"/>
           </a:xfrm>
           <a:prstGeom prst="rect">
             <a:avLst/>
@@ -13415,7 +13415,7 @@
                 <a:ea typeface="Pretendard" pitchFamily="34" charset="-122"/>
                 <a:cs typeface="Pretendard" pitchFamily="34" charset="-120"/>
               </a:rPr>
-              <a:t>새 인프라를 사는 사업이 아닙니다. 이미 깔려 있는 CCTV 위에 AI를 얹는 기존 자산의 AI 내재화 사례입니다.</a:t>
+              <a:t>새 인프라를 사는 사업이 아닙니다. 이미 깔린 CCTV 위에 AI를 얹습니다.</a:t>
             </a:r>
             <a:endParaRPr lang="en-US" sz="1150" dirty="0"/>
           </a:p>
@@ -13430,11 +13430,11 @@
         <p:spPr>
           <a:xfrm>
             <a:off x="8034528" y="1481328"/>
-            <a:ext cx="3587496" cy="1801368"/>
+            <a:ext cx="3587496" cy="1613581"/>
           </a:xfrm>
           <a:prstGeom prst="roundRect">
             <a:avLst>
-              <a:gd name="adj" fmla="val 3046"/>
+              <a:gd name="adj" fmla="val 3400"/>
             </a:avLst>
           </a:prstGeom>
           <a:solidFill>
@@ -13463,7 +13463,7 @@
         </p:nvSpPr>
         <p:spPr>
           <a:xfrm>
-            <a:off x="8308848" y="1700784"/>
+            <a:off x="8308848" y="1714841"/>
             <a:ext cx="3038856" cy="243332"/>
           </a:xfrm>
           <a:prstGeom prst="rect">
@@ -13505,7 +13505,7 @@
         </p:nvSpPr>
         <p:spPr>
           <a:xfrm>
-            <a:off x="8308848" y="2017268"/>
+            <a:off x="8308848" y="2031325"/>
             <a:ext cx="3038856" cy="306832"/>
           </a:xfrm>
           <a:prstGeom prst="rect">
@@ -13547,8 +13547,8 @@
         </p:nvSpPr>
         <p:spPr>
           <a:xfrm>
-            <a:off x="8308848" y="2433828"/>
-            <a:ext cx="3038856" cy="675132"/>
+            <a:off x="8308848" y="2447885"/>
+            <a:ext cx="3038856" cy="459232"/>
           </a:xfrm>
           <a:prstGeom prst="rect">
             <a:avLst/>
@@ -13575,7 +13575,7 @@
                 <a:ea typeface="Pretendard" pitchFamily="34" charset="-122"/>
                 <a:cs typeface="Pretendard" pitchFamily="34" charset="-120"/>
               </a:rPr>
-              <a:t>상품을 파는 유통에서 데이터를 파는 플랫폼으로. 롯데 리테일 자산의 플랫폼화 그 자체입니다.</a:t>
+              <a:t>상품을 파는 유통에서 데이터를 파는 플랫폼으로. 롯데 리테일 자산의 플랫폼화입니다.</a:t>
             </a:r>
             <a:endParaRPr lang="en-US" sz="1150" dirty="0"/>
           </a:p>
@@ -13589,7 +13589,7 @@
         </p:nvSpPr>
         <p:spPr>
           <a:xfrm>
-            <a:off x="566928" y="3465576"/>
+            <a:off x="566928" y="3277789"/>
             <a:ext cx="5486400" cy="268732"/>
           </a:xfrm>
           <a:prstGeom prst="rect">
@@ -13631,7 +13631,7 @@
         </p:nvSpPr>
         <p:spPr>
           <a:xfrm>
-            <a:off x="6217920" y="3465576"/>
+            <a:off x="6217920" y="3277789"/>
             <a:ext cx="5404104" cy="243332"/>
           </a:xfrm>
           <a:prstGeom prst="rect">
@@ -13673,12 +13673,12 @@
         </p:nvSpPr>
         <p:spPr>
           <a:xfrm>
-            <a:off x="566928" y="3794760"/>
-            <a:ext cx="2654046" cy="1629156"/>
+            <a:off x="566928" y="3606973"/>
+            <a:ext cx="2654046" cy="1477091"/>
           </a:xfrm>
           <a:prstGeom prst="roundRect">
             <a:avLst>
-              <a:gd name="adj" fmla="val 3368"/>
+              <a:gd name="adj" fmla="val 3714"/>
             </a:avLst>
           </a:prstGeom>
           <a:solidFill>
@@ -13700,8 +13700,8 @@
         </p:nvSpPr>
         <p:spPr>
           <a:xfrm>
-            <a:off x="841248" y="4014216"/>
-            <a:ext cx="2105406" cy="408432"/>
+            <a:off x="841248" y="3839297"/>
+            <a:ext cx="2105406" cy="230632"/>
           </a:xfrm>
           <a:prstGeom prst="rect">
             <a:avLst/>
@@ -13715,73 +13715,53 @@
           <a:p>
             <a:pPr algn="l" indent="0" marL="0">
               <a:lnSpc>
+                <a:spcPts val="1600"/>
+              </a:lnSpc>
+              <a:buNone/>
+            </a:pPr>
+            <a:r>
+              <a:rPr lang="en-US" sz="1350" b="1" dirty="0">
+                <a:solidFill>
+                  <a:srgbClr val="0E1420"/>
+                </a:solidFill>
+                <a:latin typeface="Pretendard" pitchFamily="34" charset="0"/>
+                <a:ea typeface="Pretendard" pitchFamily="34" charset="-122"/>
+                <a:cs typeface="Pretendard" pitchFamily="34" charset="-120"/>
+              </a:rPr>
+              <a:t>고객 기대 그 이상</a:t>
+            </a:r>
+            <a:endParaRPr lang="en-US" sz="1350" dirty="0"/>
+          </a:p>
+        </p:txBody>
+      </p:sp>
+      <p:sp>
+        <p:nvSpPr>
+          <p:cNvPr id="23" name="Text 20"/>
+          <p:cNvSpPr txBox="1"/>
+          <p:nvPr/>
+        </p:nvSpPr>
+        <p:spPr>
+          <a:xfrm>
+            <a:off x="841248" y="4179657"/>
+            <a:ext cx="2105406" cy="217932"/>
+          </a:xfrm>
+          <a:prstGeom prst="rect">
+            <a:avLst/>
+          </a:prstGeom>
+          <a:noFill/>
+          <a:ln/>
+        </p:spPr>
+        <p:txBody>
+          <a:bodyPr wrap="square" lIns="0" tIns="0" rIns="0" bIns="0" rtlCol="0" anchor="t"/>
+          <a:lstStyle/>
+          <a:p>
+            <a:pPr algn="l" indent="0" marL="0">
+              <a:lnSpc>
                 <a:spcPts val="1500"/>
               </a:lnSpc>
               <a:buNone/>
             </a:pPr>
             <a:r>
-              <a:rPr lang="en-US" sz="1250" b="1" dirty="0">
-                <a:solidFill>
-                  <a:srgbClr val="0E1420"/>
-                </a:solidFill>
-                <a:latin typeface="Pretendard" pitchFamily="34" charset="0"/>
-                <a:ea typeface="Pretendard" pitchFamily="34" charset="-122"/>
-                <a:cs typeface="Pretendard" pitchFamily="34" charset="-120"/>
-              </a:rPr>
-              <a:t>Beyond Customer</a:t>
-            </a:r>
-            <a:endParaRPr lang="en-US" sz="1250" dirty="0"/>
-          </a:p>
-          <a:p>
-            <a:pPr algn="l" indent="0" marL="0">
-              <a:lnSpc>
-                <a:spcPts val="1500"/>
-              </a:lnSpc>
-              <a:buNone/>
-            </a:pPr>
-            <a:r>
-              <a:rPr lang="en-US" sz="1250" b="1" dirty="0">
-                <a:solidFill>
-                  <a:srgbClr val="0E1420"/>
-                </a:solidFill>
-                <a:latin typeface="Pretendard" pitchFamily="34" charset="0"/>
-                <a:ea typeface="Pretendard" pitchFamily="34" charset="-122"/>
-                <a:cs typeface="Pretendard" pitchFamily="34" charset="-120"/>
-              </a:rPr>
-              <a:t>Expectation</a:t>
-            </a:r>
-            <a:endParaRPr lang="en-US" sz="1250" dirty="0"/>
-          </a:p>
-        </p:txBody>
-      </p:sp>
-      <p:sp>
-        <p:nvSpPr>
-          <p:cNvPr id="23" name="Text 20"/>
-          <p:cNvSpPr txBox="1"/>
-          <p:nvPr/>
-        </p:nvSpPr>
-        <p:spPr>
-          <a:xfrm>
-            <a:off x="841248" y="4532376"/>
-            <a:ext cx="2105406" cy="217932"/>
-          </a:xfrm>
-          <a:prstGeom prst="rect">
-            <a:avLst/>
-          </a:prstGeom>
-          <a:noFill/>
-          <a:ln/>
-        </p:spPr>
-        <p:txBody>
-          <a:bodyPr wrap="square" lIns="0" tIns="0" rIns="0" bIns="0" rtlCol="0" anchor="t"/>
-          <a:lstStyle/>
-          <a:p>
-            <a:pPr algn="l" indent="0" marL="0">
-              <a:lnSpc>
-                <a:spcPts val="1500"/>
-              </a:lnSpc>
-              <a:buNone/>
-            </a:pPr>
-            <a:r>
               <a:rPr lang="en-US" sz="1000" dirty="0">
                 <a:solidFill>
                   <a:srgbClr val="5E6979"/>
@@ -13790,7 +13770,7 @@
                 <a:ea typeface="Pretendard" pitchFamily="34" charset="-122"/>
                 <a:cs typeface="Pretendard" pitchFamily="34" charset="-120"/>
               </a:rPr>
-              <a:t>고객 기대 그 이상</a:t>
+              <a:t>Beyond Customer Expectation</a:t>
             </a:r>
             <a:endParaRPr lang="en-US" sz="1000" dirty="0"/>
           </a:p>
@@ -13804,7 +13784,7 @@
         </p:nvSpPr>
         <p:spPr>
           <a:xfrm>
-            <a:off x="841248" y="4841748"/>
+            <a:off x="841248" y="4489029"/>
             <a:ext cx="2105406" cy="408432"/>
           </a:xfrm>
           <a:prstGeom prst="rect">
@@ -13846,12 +13826,12 @@
         </p:nvSpPr>
         <p:spPr>
           <a:xfrm>
-            <a:off x="3367278" y="3794760"/>
-            <a:ext cx="2654046" cy="1629156"/>
+            <a:off x="3367278" y="3606973"/>
+            <a:ext cx="2654046" cy="1477091"/>
           </a:xfrm>
           <a:prstGeom prst="roundRect">
             <a:avLst>
-              <a:gd name="adj" fmla="val 3368"/>
+              <a:gd name="adj" fmla="val 3714"/>
             </a:avLst>
           </a:prstGeom>
           <a:solidFill>
@@ -13873,7 +13853,49 @@
         </p:nvSpPr>
         <p:spPr>
           <a:xfrm>
-            <a:off x="3641598" y="4014216"/>
+            <a:off x="3641598" y="3839297"/>
+            <a:ext cx="2105406" cy="230632"/>
+          </a:xfrm>
+          <a:prstGeom prst="rect">
+            <a:avLst/>
+          </a:prstGeom>
+          <a:noFill/>
+          <a:ln/>
+        </p:spPr>
+        <p:txBody>
+          <a:bodyPr wrap="square" lIns="0" tIns="0" rIns="0" bIns="0" rtlCol="0" anchor="t"/>
+          <a:lstStyle/>
+          <a:p>
+            <a:pPr algn="l" indent="0" marL="0">
+              <a:lnSpc>
+                <a:spcPts val="1600"/>
+              </a:lnSpc>
+              <a:buNone/>
+            </a:pPr>
+            <a:r>
+              <a:rPr lang="en-US" sz="1350" b="1" dirty="0">
+                <a:solidFill>
+                  <a:srgbClr val="0E1420"/>
+                </a:solidFill>
+                <a:latin typeface="Pretendard" pitchFamily="34" charset="0"/>
+                <a:ea typeface="Pretendard" pitchFamily="34" charset="-122"/>
+                <a:cs typeface="Pretendard" pitchFamily="34" charset="-120"/>
+              </a:rPr>
+              <a:t>도전</a:t>
+            </a:r>
+            <a:endParaRPr lang="en-US" sz="1350" dirty="0"/>
+          </a:p>
+        </p:txBody>
+      </p:sp>
+      <p:sp>
+        <p:nvSpPr>
+          <p:cNvPr id="27" name="Text 24"/>
+          <p:cNvSpPr txBox="1"/>
+          <p:nvPr/>
+        </p:nvSpPr>
+        <p:spPr>
+          <a:xfrm>
+            <a:off x="3641598" y="4179657"/>
             <a:ext cx="2105406" cy="217932"/>
           </a:xfrm>
           <a:prstGeom prst="rect">
@@ -13893,9 +13915,9 @@
               <a:buNone/>
             </a:pPr>
             <a:r>
-              <a:rPr lang="en-US" sz="1250" b="1" dirty="0">
-                <a:solidFill>
-                  <a:srgbClr val="0E1420"/>
+              <a:rPr lang="en-US" sz="1000" dirty="0">
+                <a:solidFill>
+                  <a:srgbClr val="5E6979"/>
                 </a:solidFill>
                 <a:latin typeface="Pretendard" pitchFamily="34" charset="0"/>
                 <a:ea typeface="Pretendard" pitchFamily="34" charset="-122"/>
@@ -13903,48 +13925,6 @@
               </a:rPr>
               <a:t>Challenge</a:t>
             </a:r>
-            <a:endParaRPr lang="en-US" sz="1250" dirty="0"/>
-          </a:p>
-        </p:txBody>
-      </p:sp>
-      <p:sp>
-        <p:nvSpPr>
-          <p:cNvPr id="27" name="Text 24"/>
-          <p:cNvSpPr txBox="1"/>
-          <p:nvPr/>
-        </p:nvSpPr>
-        <p:spPr>
-          <a:xfrm>
-            <a:off x="3641598" y="4341876"/>
-            <a:ext cx="2105406" cy="217932"/>
-          </a:xfrm>
-          <a:prstGeom prst="rect">
-            <a:avLst/>
-          </a:prstGeom>
-          <a:noFill/>
-          <a:ln/>
-        </p:spPr>
-        <p:txBody>
-          <a:bodyPr wrap="square" lIns="0" tIns="0" rIns="0" bIns="0" rtlCol="0" anchor="t"/>
-          <a:lstStyle/>
-          <a:p>
-            <a:pPr algn="l" indent="0" marL="0">
-              <a:lnSpc>
-                <a:spcPts val="1500"/>
-              </a:lnSpc>
-              <a:buNone/>
-            </a:pPr>
-            <a:r>
-              <a:rPr lang="en-US" sz="1000" dirty="0">
-                <a:solidFill>
-                  <a:srgbClr val="5E6979"/>
-                </a:solidFill>
-                <a:latin typeface="Pretendard" pitchFamily="34" charset="0"/>
-                <a:ea typeface="Pretendard" pitchFamily="34" charset="-122"/>
-                <a:cs typeface="Pretendard" pitchFamily="34" charset="-120"/>
-              </a:rPr>
-              <a:t>도전</a:t>
-            </a:r>
             <a:endParaRPr lang="en-US" sz="1000" dirty="0"/>
           </a:p>
         </p:txBody>
@@ -13957,7 +13937,7 @@
         </p:nvSpPr>
         <p:spPr>
           <a:xfrm>
-            <a:off x="3641598" y="4651248"/>
+            <a:off x="3641598" y="4489029"/>
             <a:ext cx="2105406" cy="408432"/>
           </a:xfrm>
           <a:prstGeom prst="rect">
@@ -13999,12 +13979,12 @@
         </p:nvSpPr>
         <p:spPr>
           <a:xfrm>
-            <a:off x="6167628" y="3794760"/>
-            <a:ext cx="2654046" cy="1629156"/>
+            <a:off x="6167628" y="3606973"/>
+            <a:ext cx="2654046" cy="1477091"/>
           </a:xfrm>
           <a:prstGeom prst="roundRect">
             <a:avLst>
-              <a:gd name="adj" fmla="val 3368"/>
+              <a:gd name="adj" fmla="val 3714"/>
             </a:avLst>
           </a:prstGeom>
           <a:solidFill>
@@ -14026,7 +14006,49 @@
         </p:nvSpPr>
         <p:spPr>
           <a:xfrm>
-            <a:off x="6441948" y="4014216"/>
+            <a:off x="6441948" y="3839297"/>
+            <a:ext cx="2105406" cy="230632"/>
+          </a:xfrm>
+          <a:prstGeom prst="rect">
+            <a:avLst/>
+          </a:prstGeom>
+          <a:noFill/>
+          <a:ln/>
+        </p:spPr>
+        <p:txBody>
+          <a:bodyPr wrap="square" lIns="0" tIns="0" rIns="0" bIns="0" rtlCol="0" anchor="t"/>
+          <a:lstStyle/>
+          <a:p>
+            <a:pPr algn="l" indent="0" marL="0">
+              <a:lnSpc>
+                <a:spcPts val="1600"/>
+              </a:lnSpc>
+              <a:buNone/>
+            </a:pPr>
+            <a:r>
+              <a:rPr lang="en-US" sz="1350" b="1" dirty="0">
+                <a:solidFill>
+                  <a:srgbClr val="0E1420"/>
+                </a:solidFill>
+                <a:latin typeface="Pretendard" pitchFamily="34" charset="0"/>
+                <a:ea typeface="Pretendard" pitchFamily="34" charset="-122"/>
+                <a:cs typeface="Pretendard" pitchFamily="34" charset="-120"/>
+              </a:rPr>
+              <a:t>존중</a:t>
+            </a:r>
+            <a:endParaRPr lang="en-US" sz="1350" dirty="0"/>
+          </a:p>
+        </p:txBody>
+      </p:sp>
+      <p:sp>
+        <p:nvSpPr>
+          <p:cNvPr id="31" name="Text 28"/>
+          <p:cNvSpPr txBox="1"/>
+          <p:nvPr/>
+        </p:nvSpPr>
+        <p:spPr>
+          <a:xfrm>
+            <a:off x="6441948" y="4179657"/>
             <a:ext cx="2105406" cy="217932"/>
           </a:xfrm>
           <a:prstGeom prst="rect">
@@ -14046,7 +14068,49 @@
               <a:buNone/>
             </a:pPr>
             <a:r>
-              <a:rPr lang="en-US" sz="1250" b="1" dirty="0">
+              <a:rPr lang="en-US" sz="1000" dirty="0">
+                <a:solidFill>
+                  <a:srgbClr val="5E6979"/>
+                </a:solidFill>
+                <a:latin typeface="Pretendard" pitchFamily="34" charset="0"/>
+                <a:ea typeface="Pretendard" pitchFamily="34" charset="-122"/>
+                <a:cs typeface="Pretendard" pitchFamily="34" charset="-120"/>
+              </a:rPr>
+              <a:t>Respect</a:t>
+            </a:r>
+            <a:endParaRPr lang="en-US" sz="1000" dirty="0"/>
+          </a:p>
+        </p:txBody>
+      </p:sp>
+      <p:sp>
+        <p:nvSpPr>
+          <p:cNvPr id="32" name="Text 29"/>
+          <p:cNvSpPr txBox="1"/>
+          <p:nvPr/>
+        </p:nvSpPr>
+        <p:spPr>
+          <a:xfrm>
+            <a:off x="6441948" y="4489029"/>
+            <a:ext cx="2105406" cy="408432"/>
+          </a:xfrm>
+          <a:prstGeom prst="rect">
+            <a:avLst/>
+          </a:prstGeom>
+          <a:noFill/>
+          <a:ln/>
+        </p:spPr>
+        <p:txBody>
+          <a:bodyPr wrap="square" lIns="0" tIns="0" rIns="0" bIns="0" rtlCol="0" anchor="t"/>
+          <a:lstStyle/>
+          <a:p>
+            <a:pPr algn="l" indent="0" marL="0">
+              <a:lnSpc>
+                <a:spcPts val="1500"/>
+              </a:lnSpc>
+              <a:buNone/>
+            </a:pPr>
+            <a:r>
+              <a:rPr lang="en-US" sz="1000" dirty="0">
                 <a:solidFill>
                   <a:srgbClr val="0E1420"/>
                 </a:solidFill>
@@ -14054,91 +14118,7 @@
                 <a:ea typeface="Pretendard" pitchFamily="34" charset="-122"/>
                 <a:cs typeface="Pretendard" pitchFamily="34" charset="-120"/>
               </a:rPr>
-              <a:t>Respect</a:t>
-            </a:r>
-            <a:endParaRPr lang="en-US" sz="1250" dirty="0"/>
-          </a:p>
-        </p:txBody>
-      </p:sp>
-      <p:sp>
-        <p:nvSpPr>
-          <p:cNvPr id="31" name="Text 28"/>
-          <p:cNvSpPr txBox="1"/>
-          <p:nvPr/>
-        </p:nvSpPr>
-        <p:spPr>
-          <a:xfrm>
-            <a:off x="6441948" y="4341876"/>
-            <a:ext cx="2105406" cy="217932"/>
-          </a:xfrm>
-          <a:prstGeom prst="rect">
-            <a:avLst/>
-          </a:prstGeom>
-          <a:noFill/>
-          <a:ln/>
-        </p:spPr>
-        <p:txBody>
-          <a:bodyPr wrap="square" lIns="0" tIns="0" rIns="0" bIns="0" rtlCol="0" anchor="t"/>
-          <a:lstStyle/>
-          <a:p>
-            <a:pPr algn="l" indent="0" marL="0">
-              <a:lnSpc>
-                <a:spcPts val="1500"/>
-              </a:lnSpc>
-              <a:buNone/>
-            </a:pPr>
-            <a:r>
-              <a:rPr lang="en-US" sz="1000" dirty="0">
-                <a:solidFill>
-                  <a:srgbClr val="5E6979"/>
-                </a:solidFill>
-                <a:latin typeface="Pretendard" pitchFamily="34" charset="0"/>
-                <a:ea typeface="Pretendard" pitchFamily="34" charset="-122"/>
-                <a:cs typeface="Pretendard" pitchFamily="34" charset="-120"/>
-              </a:rPr>
-              <a:t>존중</a:t>
-            </a:r>
-            <a:endParaRPr lang="en-US" sz="1000" dirty="0"/>
-          </a:p>
-        </p:txBody>
-      </p:sp>
-      <p:sp>
-        <p:nvSpPr>
-          <p:cNvPr id="32" name="Text 29"/>
-          <p:cNvSpPr txBox="1"/>
-          <p:nvPr/>
-        </p:nvSpPr>
-        <p:spPr>
-          <a:xfrm>
-            <a:off x="6441948" y="4651248"/>
-            <a:ext cx="2105406" cy="598932"/>
-          </a:xfrm>
-          <a:prstGeom prst="rect">
-            <a:avLst/>
-          </a:prstGeom>
-          <a:noFill/>
-          <a:ln/>
-        </p:spPr>
-        <p:txBody>
-          <a:bodyPr wrap="square" lIns="0" tIns="0" rIns="0" bIns="0" rtlCol="0" anchor="t"/>
-          <a:lstStyle/>
-          <a:p>
-            <a:pPr algn="l" indent="0" marL="0">
-              <a:lnSpc>
-                <a:spcPts val="1500"/>
-              </a:lnSpc>
-              <a:buNone/>
-            </a:pPr>
-            <a:r>
-              <a:rPr lang="en-US" sz="1000" dirty="0">
-                <a:solidFill>
-                  <a:srgbClr val="0E1420"/>
-                </a:solidFill>
-                <a:latin typeface="Pretendard" pitchFamily="34" charset="0"/>
-                <a:ea typeface="Pretendard" pitchFamily="34" charset="-122"/>
-                <a:cs typeface="Pretendard" pitchFamily="34" charset="-120"/>
-              </a:rPr>
-              <a:t>사람을 추적하지 않고 공간을 측정합니다. 동의 없이 개인을 연결하지 않습니다.</a:t>
+              <a:t>사람을 추적하지 않고 공간을 측정합니다. 개인 연결은 동의 시에만.</a:t>
             </a:r>
             <a:endParaRPr lang="en-US" sz="1000" dirty="0"/>
           </a:p>
@@ -14152,12 +14132,12 @@
         </p:nvSpPr>
         <p:spPr>
           <a:xfrm>
-            <a:off x="8967978" y="3794760"/>
-            <a:ext cx="2654046" cy="1629156"/>
+            <a:off x="8967978" y="3606973"/>
+            <a:ext cx="2654046" cy="1477091"/>
           </a:xfrm>
           <a:prstGeom prst="roundRect">
             <a:avLst>
-              <a:gd name="adj" fmla="val 3368"/>
+              <a:gd name="adj" fmla="val 3714"/>
             </a:avLst>
           </a:prstGeom>
           <a:solidFill>
@@ -14179,7 +14159,49 @@
         </p:nvSpPr>
         <p:spPr>
           <a:xfrm>
-            <a:off x="9242298" y="4014216"/>
+            <a:off x="9242298" y="3839297"/>
+            <a:ext cx="2105406" cy="230632"/>
+          </a:xfrm>
+          <a:prstGeom prst="rect">
+            <a:avLst/>
+          </a:prstGeom>
+          <a:noFill/>
+          <a:ln/>
+        </p:spPr>
+        <p:txBody>
+          <a:bodyPr wrap="square" lIns="0" tIns="0" rIns="0" bIns="0" rtlCol="0" anchor="t"/>
+          <a:lstStyle/>
+          <a:p>
+            <a:pPr algn="l" indent="0" marL="0">
+              <a:lnSpc>
+                <a:spcPts val="1600"/>
+              </a:lnSpc>
+              <a:buNone/>
+            </a:pPr>
+            <a:r>
+              <a:rPr lang="en-US" sz="1350" b="1" dirty="0">
+                <a:solidFill>
+                  <a:srgbClr val="0E1420"/>
+                </a:solidFill>
+                <a:latin typeface="Pretendard" pitchFamily="34" charset="0"/>
+                <a:ea typeface="Pretendard" pitchFamily="34" charset="-122"/>
+                <a:cs typeface="Pretendard" pitchFamily="34" charset="-120"/>
+              </a:rPr>
+              <a:t>독창성</a:t>
+            </a:r>
+            <a:endParaRPr lang="en-US" sz="1350" dirty="0"/>
+          </a:p>
+        </p:txBody>
+      </p:sp>
+      <p:sp>
+        <p:nvSpPr>
+          <p:cNvPr id="35" name="Text 32"/>
+          <p:cNvSpPr txBox="1"/>
+          <p:nvPr/>
+        </p:nvSpPr>
+        <p:spPr>
+          <a:xfrm>
+            <a:off x="9242298" y="4179657"/>
             <a:ext cx="2105406" cy="217932"/>
           </a:xfrm>
           <a:prstGeom prst="rect">
@@ -14199,9 +14221,9 @@
               <a:buNone/>
             </a:pPr>
             <a:r>
-              <a:rPr lang="en-US" sz="1250" b="1" dirty="0">
-                <a:solidFill>
-                  <a:srgbClr val="0E1420"/>
+              <a:rPr lang="en-US" sz="1000" dirty="0">
+                <a:solidFill>
+                  <a:srgbClr val="5E6979"/>
                 </a:solidFill>
                 <a:latin typeface="Pretendard" pitchFamily="34" charset="0"/>
                 <a:ea typeface="Pretendard" pitchFamily="34" charset="-122"/>
@@ -14209,48 +14231,6 @@
               </a:rPr>
               <a:t>Originality</a:t>
             </a:r>
-            <a:endParaRPr lang="en-US" sz="1250" dirty="0"/>
-          </a:p>
-        </p:txBody>
-      </p:sp>
-      <p:sp>
-        <p:nvSpPr>
-          <p:cNvPr id="35" name="Text 32"/>
-          <p:cNvSpPr txBox="1"/>
-          <p:nvPr/>
-        </p:nvSpPr>
-        <p:spPr>
-          <a:xfrm>
-            <a:off x="9242298" y="4341876"/>
-            <a:ext cx="2105406" cy="217932"/>
-          </a:xfrm>
-          <a:prstGeom prst="rect">
-            <a:avLst/>
-          </a:prstGeom>
-          <a:noFill/>
-          <a:ln/>
-        </p:spPr>
-        <p:txBody>
-          <a:bodyPr wrap="square" lIns="0" tIns="0" rIns="0" bIns="0" rtlCol="0" anchor="t"/>
-          <a:lstStyle/>
-          <a:p>
-            <a:pPr algn="l" indent="0" marL="0">
-              <a:lnSpc>
-                <a:spcPts val="1500"/>
-              </a:lnSpc>
-              <a:buNone/>
-            </a:pPr>
-            <a:r>
-              <a:rPr lang="en-US" sz="1000" dirty="0">
-                <a:solidFill>
-                  <a:srgbClr val="5E6979"/>
-                </a:solidFill>
-                <a:latin typeface="Pretendard" pitchFamily="34" charset="0"/>
-                <a:ea typeface="Pretendard" pitchFamily="34" charset="-122"/>
-                <a:cs typeface="Pretendard" pitchFamily="34" charset="-120"/>
-              </a:rPr>
-              <a:t>독창성</a:t>
-            </a:r>
             <a:endParaRPr lang="en-US" sz="1000" dirty="0"/>
           </a:p>
         </p:txBody>
@@ -14263,7 +14243,7 @@
         </p:nvSpPr>
         <p:spPr>
           <a:xfrm>
-            <a:off x="9242298" y="4651248"/>
+            <a:off x="9242298" y="4489029"/>
             <a:ext cx="2105406" cy="408432"/>
           </a:xfrm>
           <a:prstGeom prst="rect">
@@ -14618,7 +14598,7 @@
         </p:nvSpPr>
         <p:spPr>
           <a:xfrm>
-            <a:off x="841248" y="1700784"/>
+            <a:off x="841248" y="1965441"/>
             <a:ext cx="3038856" cy="243332"/>
           </a:xfrm>
           <a:prstGeom prst="rect">
@@ -14660,7 +14640,7 @@
         </p:nvSpPr>
         <p:spPr>
           <a:xfrm>
-            <a:off x="841248" y="2017268"/>
+            <a:off x="841248" y="2281925"/>
             <a:ext cx="3038856" cy="306832"/>
           </a:xfrm>
           <a:prstGeom prst="rect">
@@ -14702,7 +14682,7 @@
         </p:nvSpPr>
         <p:spPr>
           <a:xfrm>
-            <a:off x="841248" y="2433828"/>
+            <a:off x="841248" y="2698485"/>
             <a:ext cx="3038856" cy="1043432"/>
           </a:xfrm>
           <a:prstGeom prst="rect">
@@ -14798,7 +14778,7 @@
         </p:nvSpPr>
         <p:spPr>
           <a:xfrm>
-            <a:off x="4575048" y="1700784"/>
+            <a:off x="4575048" y="1965441"/>
             <a:ext cx="3038856" cy="243332"/>
           </a:xfrm>
           <a:prstGeom prst="rect">
@@ -14840,7 +14820,7 @@
         </p:nvSpPr>
         <p:spPr>
           <a:xfrm>
-            <a:off x="4575048" y="2017268"/>
+            <a:off x="4575048" y="2281925"/>
             <a:ext cx="3038856" cy="306832"/>
           </a:xfrm>
           <a:prstGeom prst="rect">
@@ -14882,7 +14862,7 @@
         </p:nvSpPr>
         <p:spPr>
           <a:xfrm>
-            <a:off x="4575048" y="2433828"/>
+            <a:off x="4575048" y="2698485"/>
             <a:ext cx="3038856" cy="535432"/>
           </a:xfrm>
           <a:prstGeom prst="rect">
@@ -14958,7 +14938,7 @@
         </p:nvSpPr>
         <p:spPr>
           <a:xfrm>
-            <a:off x="8308848" y="1700784"/>
+            <a:off x="8308848" y="1965441"/>
             <a:ext cx="3038856" cy="243332"/>
           </a:xfrm>
           <a:prstGeom prst="rect">
@@ -15000,7 +14980,7 @@
         </p:nvSpPr>
         <p:spPr>
           <a:xfrm>
-            <a:off x="8308848" y="2017268"/>
+            <a:off x="8308848" y="2281925"/>
             <a:ext cx="3038856" cy="306832"/>
           </a:xfrm>
           <a:prstGeom prst="rect">
@@ -15042,7 +15022,7 @@
         </p:nvSpPr>
         <p:spPr>
           <a:xfrm>
-            <a:off x="8308848" y="2433828"/>
+            <a:off x="8308848" y="2698485"/>
             <a:ext cx="3038856" cy="535432"/>
           </a:xfrm>
           <a:prstGeom prst="rect">
@@ -18649,7 +18629,7 @@
         </p:nvSpPr>
         <p:spPr>
           <a:xfrm>
-            <a:off x="841248" y="1700784"/>
+            <a:off x="841248" y="2222246"/>
             <a:ext cx="3038856" cy="306832"/>
           </a:xfrm>
           <a:prstGeom prst="rect">
@@ -18691,7 +18671,7 @@
         </p:nvSpPr>
         <p:spPr>
           <a:xfrm>
-            <a:off x="841248" y="2117344"/>
+            <a:off x="841248" y="2638806"/>
             <a:ext cx="3038856" cy="1221232"/>
           </a:xfrm>
           <a:prstGeom prst="rect">
@@ -18861,7 +18841,7 @@
         </p:nvSpPr>
         <p:spPr>
           <a:xfrm>
-            <a:off x="4575048" y="1700784"/>
+            <a:off x="4575048" y="2222246"/>
             <a:ext cx="3038856" cy="306832"/>
           </a:xfrm>
           <a:prstGeom prst="rect">
@@ -18903,7 +18883,7 @@
         </p:nvSpPr>
         <p:spPr>
           <a:xfrm>
-            <a:off x="4575048" y="2117344"/>
+            <a:off x="4575048" y="2638806"/>
             <a:ext cx="3038856" cy="967232"/>
           </a:xfrm>
           <a:prstGeom prst="rect">
@@ -19073,7 +19053,7 @@
         </p:nvSpPr>
         <p:spPr>
           <a:xfrm>
-            <a:off x="8308848" y="1700784"/>
+            <a:off x="8308848" y="2222246"/>
             <a:ext cx="3038856" cy="306832"/>
           </a:xfrm>
           <a:prstGeom prst="rect">
@@ -19115,7 +19095,7 @@
         </p:nvSpPr>
         <p:spPr>
           <a:xfrm>
-            <a:off x="8308848" y="2117344"/>
+            <a:off x="8308848" y="2638806"/>
             <a:ext cx="3038856" cy="1221232"/>
           </a:xfrm>
           <a:prstGeom prst="rect">
